--- a/charts-example.pptx
+++ b/charts-example.pptx
@@ -1307,7 +1307,7 @@
             <a:ext cx="7315200" cy="914400"/>
           </a:xfrm>
         </a:spPr>
-        <a:txBody>
+        <p:txBody>
           <a:bodyPr/>
           <a:p>
             <a:r>
@@ -1315,7 +1315,7 @@
               <a:t>Quarterly Sales Comparison</a:t>
             </a:r>
           </a:p>
-        </a:txBody>
+        </p:txBody>
       </p:sp>
       <p:graphicFrame>
         <p:nvGraphicFramePr>
@@ -1360,7 +1360,7 @@
             <a:ext cx="7315200" cy="914400"/>
           </a:xfrm>
         </a:spPr>
-        <a:txBody>
+        <p:txBody>
           <a:bodyPr/>
           <a:p>
             <a:r>
@@ -1368,7 +1368,7 @@
               <a:t>Monthly Temperature Trends</a:t>
             </a:r>
           </a:p>
-        </a:txBody>
+        </p:txBody>
       </p:sp>
       <p:graphicFrame>
         <p:nvGraphicFramePr>
@@ -1413,7 +1413,7 @@
             <a:ext cx="7315200" cy="914400"/>
           </a:xfrm>
         </a:spPr>
-        <a:txBody>
+        <p:txBody>
           <a:bodyPr/>
           <a:p>
             <a:r>
@@ -1421,7 +1421,7 @@
               <a:t>Market Share Distribution</a:t>
             </a:r>
           </a:p>
-        </a:txBody>
+        </p:txBody>
       </p:sp>
       <p:graphicFrame>
         <p:nvGraphicFramePr>
@@ -1466,7 +1466,7 @@
             <a:ext cx="7315200" cy="914400"/>
           </a:xfrm>
         </a:spPr>
-        <a:txBody>
+        <p:txBody>
           <a:bodyPr/>
           <a:p>
             <a:r>
@@ -1474,7 +1474,7 @@
               <a:t>Cumulative Revenue Growth</a:t>
             </a:r>
           </a:p>
-        </a:txBody>
+        </p:txBody>
       </p:sp>
       <p:graphicFrame>
         <p:nvGraphicFramePr>
@@ -1519,7 +1519,7 @@
             <a:ext cx="7315200" cy="914400"/>
           </a:xfrm>
         </a:spPr>
-        <a:txBody>
+        <p:txBody>
           <a:bodyPr/>
           <a:p>
             <a:r>
@@ -1527,7 +1527,7 @@
               <a:t>Price vs Demand Analysis</a:t>
             </a:r>
           </a:p>
-        </a:txBody>
+        </p:txBody>
       </p:sp>
       <p:graphicFrame>
         <p:nvGraphicFramePr>
@@ -1572,7 +1572,7 @@
             <a:ext cx="7315200" cy="914400"/>
           </a:xfrm>
         </a:spPr>
-        <a:txBody>
+        <p:txBody>
           <a:bodyPr/>
           <a:p>
             <a:r>
@@ -1580,7 +1580,7 @@
               <a:t>Annual Budget Allocation</a:t>
             </a:r>
           </a:p>
-        </a:txBody>
+        </p:txBody>
       </p:sp>
       <p:graphicFrame>
         <p:nvGraphicFramePr>
